--- a/docs/Weekly_Update_2026-09-18.pptx
+++ b/docs/Weekly_Update_2026-09-18.pptx
@@ -9,8 +9,8 @@
     <p:sldId id="257" r:id="rId8"/>
     <p:sldId id="258" r:id="rId9"/>
     <p:sldId id="259" r:id="rId10"/>
-    <p:sldId id="260" r:id="rId11"/>
-    <p:sldId id="261" r:id="rId12"/>
+    <p:sldId id="260" r:id="rId12"/>
+    <p:sldId id="261" r:id="rId13"/>
   </p:sldIdLst>
   <p:sldSz cx="12191695" cy="6858000" type="screen4x3"/>
   <p:notesSz cx="6858000" cy="9144000"/>
@@ -110,6 +110,426 @@
     </a:lvl9pPr>
   </p:defaultTextStyle>
 </p:presentation>
+</file>
+
+<file path=ppt/notesMasters/notesMaster1.xml><?xml version="1.0" encoding="utf-8"?>
+<p:notesMaster xmlns:a="http://schemas.openxmlformats.org/drawingml/2006/main" xmlns:p="http://schemas.openxmlformats.org/presentationml/2006/main" xmlns:r="http://schemas.openxmlformats.org/officeDocument/2006/relationships">
+  <p:cSld>
+    <p:bg>
+      <p:bgRef idx="1001">
+        <a:schemeClr val="bg1"/>
+      </p:bgRef>
+    </p:bg>
+    <p:spTree>
+      <p:nvGrpSpPr>
+        <p:cNvPr id="1" name=""/>
+        <p:cNvGrpSpPr/>
+        <p:nvPr/>
+      </p:nvGrpSpPr>
+      <p:grpSpPr>
+        <a:xfrm>
+          <a:off x="0" y="0"/>
+          <a:ext cx="0" cy="0"/>
+          <a:chOff x="0" y="0"/>
+          <a:chExt cx="0" cy="0"/>
+        </a:xfrm>
+      </p:grpSpPr>
+      <p:sp>
+        <p:nvSpPr>
+          <p:cNvPr id="2" name="Header Placeholder 1"/>
+          <p:cNvSpPr>
+            <a:spLocks noGrp="1"/>
+          </p:cNvSpPr>
+          <p:nvPr>
+            <p:ph type="hdr" sz="quarter"/>
+          </p:nvPr>
+        </p:nvSpPr>
+        <p:spPr>
+          <a:xfrm>
+            <a:off x="0" y="0"/>
+            <a:ext cx="2971800" cy="457200"/>
+          </a:xfrm>
+          <a:prstGeom prst="rect">
+            <a:avLst/>
+          </a:prstGeom>
+        </p:spPr>
+        <p:txBody>
+          <a:bodyPr vert="horz" lIns="91440" tIns="45720" rIns="91440" bIns="45720" rtlCol="0"/>
+          <a:lstStyle>
+            <a:lvl1pPr algn="l">
+              <a:defRPr sz="1200"/>
+            </a:lvl1pPr>
+          </a:lstStyle>
+          <a:p>
+            <a:endParaRPr lang="en-US"/>
+          </a:p>
+        </p:txBody>
+      </p:sp>
+      <p:sp>
+        <p:nvSpPr>
+          <p:cNvPr id="3" name="Date Placeholder 2"/>
+          <p:cNvSpPr>
+            <a:spLocks noGrp="1"/>
+          </p:cNvSpPr>
+          <p:nvPr>
+            <p:ph type="dt" idx="1"/>
+          </p:nvPr>
+        </p:nvSpPr>
+        <p:spPr>
+          <a:xfrm>
+            <a:off x="3884613" y="0"/>
+            <a:ext cx="2971800" cy="457200"/>
+          </a:xfrm>
+          <a:prstGeom prst="rect">
+            <a:avLst/>
+          </a:prstGeom>
+        </p:spPr>
+        <p:txBody>
+          <a:bodyPr vert="horz" lIns="91440" tIns="45720" rIns="91440" bIns="45720" rtlCol="0"/>
+          <a:lstStyle>
+            <a:lvl1pPr algn="r">
+              <a:defRPr sz="1200"/>
+            </a:lvl1pPr>
+          </a:lstStyle>
+          <a:p>
+            <a:fld id="{0F89C1C7-3DCD-1040-A9CF-14679D8B5DDD}" type="datetimeFigureOut">
+              <a:rPr lang="en-US" smtClean="0"/>
+              <a:t>10/17/16</a:t>
+            </a:fld>
+            <a:endParaRPr lang="en-US"/>
+          </a:p>
+        </p:txBody>
+      </p:sp>
+      <p:sp>
+        <p:nvSpPr>
+          <p:cNvPr id="4" name="Slide Image Placeholder 3"/>
+          <p:cNvSpPr>
+            <a:spLocks noGrp="1" noRot="1" noChangeAspect="1"/>
+          </p:cNvSpPr>
+          <p:nvPr>
+            <p:ph type="sldImg" idx="2"/>
+          </p:nvPr>
+        </p:nvSpPr>
+        <p:spPr>
+          <a:xfrm>
+            <a:off x="1143000" y="685800"/>
+            <a:ext cx="4572000" cy="3429000"/>
+          </a:xfrm>
+          <a:prstGeom prst="rect">
+            <a:avLst/>
+          </a:prstGeom>
+          <a:noFill/>
+          <a:ln w="12700">
+            <a:solidFill>
+              <a:prstClr val="black"/>
+            </a:solidFill>
+          </a:ln>
+        </p:spPr>
+        <p:txBody>
+          <a:bodyPr vert="horz" lIns="91440" tIns="45720" rIns="91440" bIns="45720" rtlCol="0" anchor="ctr"/>
+          <a:lstStyle/>
+          <a:p>
+            <a:endParaRPr lang="en-US"/>
+          </a:p>
+        </p:txBody>
+      </p:sp>
+      <p:sp>
+        <p:nvSpPr>
+          <p:cNvPr id="5" name="Notes Placeholder 4"/>
+          <p:cNvSpPr>
+            <a:spLocks noGrp="1"/>
+          </p:cNvSpPr>
+          <p:nvPr>
+            <p:ph type="body" sz="quarter" idx="3"/>
+          </p:nvPr>
+        </p:nvSpPr>
+        <p:spPr>
+          <a:xfrm>
+            <a:off x="685800" y="4343400"/>
+            <a:ext cx="5486400" cy="4114800"/>
+          </a:xfrm>
+          <a:prstGeom prst="rect">
+            <a:avLst/>
+          </a:prstGeom>
+        </p:spPr>
+        <p:txBody>
+          <a:bodyPr vert="horz" lIns="91440" tIns="45720" rIns="91440" bIns="45720" rtlCol="0"/>
+          <a:lstStyle/>
+          <a:p>
+            <a:pPr lvl="0"/>
+            <a:r>
+              <a:rPr lang="en-US" smtClean="0"/>
+              <a:t>Click to edit Master text styles</a:t>
+            </a:r>
+          </a:p>
+          <a:p>
+            <a:pPr lvl="1"/>
+            <a:r>
+              <a:rPr lang="en-US" smtClean="0"/>
+              <a:t>Second level</a:t>
+            </a:r>
+          </a:p>
+          <a:p>
+            <a:pPr lvl="2"/>
+            <a:r>
+              <a:rPr lang="en-US" smtClean="0"/>
+              <a:t>Third level</a:t>
+            </a:r>
+          </a:p>
+          <a:p>
+            <a:pPr lvl="3"/>
+            <a:r>
+              <a:rPr lang="en-US" smtClean="0"/>
+              <a:t>Fourth level</a:t>
+            </a:r>
+          </a:p>
+          <a:p>
+            <a:pPr lvl="4"/>
+            <a:r>
+              <a:rPr lang="en-US" smtClean="0"/>
+              <a:t>Fifth level</a:t>
+            </a:r>
+            <a:endParaRPr lang="en-US"/>
+          </a:p>
+        </p:txBody>
+      </p:sp>
+      <p:sp>
+        <p:nvSpPr>
+          <p:cNvPr id="6" name="Footer Placeholder 5"/>
+          <p:cNvSpPr>
+            <a:spLocks noGrp="1"/>
+          </p:cNvSpPr>
+          <p:nvPr>
+            <p:ph type="ftr" sz="quarter" idx="4"/>
+          </p:nvPr>
+        </p:nvSpPr>
+        <p:spPr>
+          <a:xfrm>
+            <a:off x="0" y="8685213"/>
+            <a:ext cx="2971800" cy="457200"/>
+          </a:xfrm>
+          <a:prstGeom prst="rect">
+            <a:avLst/>
+          </a:prstGeom>
+        </p:spPr>
+        <p:txBody>
+          <a:bodyPr vert="horz" lIns="91440" tIns="45720" rIns="91440" bIns="45720" rtlCol="0" anchor="b"/>
+          <a:lstStyle>
+            <a:lvl1pPr algn="l">
+              <a:defRPr sz="1200"/>
+            </a:lvl1pPr>
+          </a:lstStyle>
+          <a:p>
+            <a:endParaRPr lang="en-US"/>
+          </a:p>
+        </p:txBody>
+      </p:sp>
+      <p:sp>
+        <p:nvSpPr>
+          <p:cNvPr id="7" name="Slide Number Placeholder 6"/>
+          <p:cNvSpPr>
+            <a:spLocks noGrp="1"/>
+          </p:cNvSpPr>
+          <p:nvPr>
+            <p:ph type="sldNum" sz="quarter" idx="5"/>
+          </p:nvPr>
+        </p:nvSpPr>
+        <p:spPr>
+          <a:xfrm>
+            <a:off x="3884613" y="8685213"/>
+            <a:ext cx="2971800" cy="457200"/>
+          </a:xfrm>
+          <a:prstGeom prst="rect">
+            <a:avLst/>
+          </a:prstGeom>
+        </p:spPr>
+        <p:txBody>
+          <a:bodyPr vert="horz" lIns="91440" tIns="45720" rIns="91440" bIns="45720" rtlCol="0" anchor="b"/>
+          <a:lstStyle>
+            <a:lvl1pPr algn="r">
+              <a:defRPr sz="1200"/>
+            </a:lvl1pPr>
+          </a:lstStyle>
+          <a:p>
+            <a:fld id="{BB5E49A5-4136-284D-997B-48E1D791AD67}" type="slidenum">
+              <a:rPr lang="en-US" smtClean="0"/>
+              <a:t>‹#›</a:t>
+            </a:fld>
+            <a:endParaRPr lang="en-US"/>
+          </a:p>
+        </p:txBody>
+      </p:sp>
+    </p:spTree>
+    <p:extLst>
+      <p:ext uri="{BB962C8B-B14F-4D97-AF65-F5344CB8AC3E}">
+        <p14:creationId xmlns:p14="http://schemas.microsoft.com/office/powerpoint/2010/main" val="2623252185"/>
+      </p:ext>
+    </p:extLst>
+  </p:cSld>
+  <p:clrMap bg1="lt1" tx1="dk1" bg2="lt2" tx2="dk2" accent1="accent1" accent2="accent2" accent3="accent3" accent4="accent4" accent5="accent5" accent6="accent6" hlink="hlink" folHlink="folHlink"/>
+  <p:notesStyle>
+    <a:lvl1pPr marL="0" algn="l" defTabSz="457200" rtl="0" eaLnBrk="1" latinLnBrk="0" hangingPunct="1">
+      <a:defRPr sz="1200" kern="1200">
+        <a:solidFill>
+          <a:schemeClr val="tx1"/>
+        </a:solidFill>
+        <a:latin typeface="+mn-lt"/>
+        <a:ea typeface="+mn-ea"/>
+        <a:cs typeface="+mn-cs"/>
+      </a:defRPr>
+    </a:lvl1pPr>
+    <a:lvl2pPr marL="457200" algn="l" defTabSz="457200" rtl="0" eaLnBrk="1" latinLnBrk="0" hangingPunct="1">
+      <a:defRPr sz="1200" kern="1200">
+        <a:solidFill>
+          <a:schemeClr val="tx1"/>
+        </a:solidFill>
+        <a:latin typeface="+mn-lt"/>
+        <a:ea typeface="+mn-ea"/>
+        <a:cs typeface="+mn-cs"/>
+      </a:defRPr>
+    </a:lvl2pPr>
+    <a:lvl3pPr marL="914400" algn="l" defTabSz="457200" rtl="0" eaLnBrk="1" latinLnBrk="0" hangingPunct="1">
+      <a:defRPr sz="1200" kern="1200">
+        <a:solidFill>
+          <a:schemeClr val="tx1"/>
+        </a:solidFill>
+        <a:latin typeface="+mn-lt"/>
+        <a:ea typeface="+mn-ea"/>
+        <a:cs typeface="+mn-cs"/>
+      </a:defRPr>
+    </a:lvl3pPr>
+    <a:lvl4pPr marL="1371600" algn="l" defTabSz="457200" rtl="0" eaLnBrk="1" latinLnBrk="0" hangingPunct="1">
+      <a:defRPr sz="1200" kern="1200">
+        <a:solidFill>
+          <a:schemeClr val="tx1"/>
+        </a:solidFill>
+        <a:latin typeface="+mn-lt"/>
+        <a:ea typeface="+mn-ea"/>
+        <a:cs typeface="+mn-cs"/>
+      </a:defRPr>
+    </a:lvl4pPr>
+    <a:lvl5pPr marL="1828800" algn="l" defTabSz="457200" rtl="0" eaLnBrk="1" latinLnBrk="0" hangingPunct="1">
+      <a:defRPr sz="1200" kern="1200">
+        <a:solidFill>
+          <a:schemeClr val="tx1"/>
+        </a:solidFill>
+        <a:latin typeface="+mn-lt"/>
+        <a:ea typeface="+mn-ea"/>
+        <a:cs typeface="+mn-cs"/>
+      </a:defRPr>
+    </a:lvl5pPr>
+    <a:lvl6pPr marL="2286000" algn="l" defTabSz="457200" rtl="0" eaLnBrk="1" latinLnBrk="0" hangingPunct="1">
+      <a:defRPr sz="1200" kern="1200">
+        <a:solidFill>
+          <a:schemeClr val="tx1"/>
+        </a:solidFill>
+        <a:latin typeface="+mn-lt"/>
+        <a:ea typeface="+mn-ea"/>
+        <a:cs typeface="+mn-cs"/>
+      </a:defRPr>
+    </a:lvl6pPr>
+    <a:lvl7pPr marL="2743200" algn="l" defTabSz="457200" rtl="0" eaLnBrk="1" latinLnBrk="0" hangingPunct="1">
+      <a:defRPr sz="1200" kern="1200">
+        <a:solidFill>
+          <a:schemeClr val="tx1"/>
+        </a:solidFill>
+        <a:latin typeface="+mn-lt"/>
+        <a:ea typeface="+mn-ea"/>
+        <a:cs typeface="+mn-cs"/>
+      </a:defRPr>
+    </a:lvl7pPr>
+    <a:lvl8pPr marL="3200400" algn="l" defTabSz="457200" rtl="0" eaLnBrk="1" latinLnBrk="0" hangingPunct="1">
+      <a:defRPr sz="1200" kern="1200">
+        <a:solidFill>
+          <a:schemeClr val="tx1"/>
+        </a:solidFill>
+        <a:latin typeface="+mn-lt"/>
+        <a:ea typeface="+mn-ea"/>
+        <a:cs typeface="+mn-cs"/>
+      </a:defRPr>
+    </a:lvl8pPr>
+    <a:lvl9pPr marL="3657600" algn="l" defTabSz="457200" rtl="0" eaLnBrk="1" latinLnBrk="0" hangingPunct="1">
+      <a:defRPr sz="1200" kern="1200">
+        <a:solidFill>
+          <a:schemeClr val="tx1"/>
+        </a:solidFill>
+        <a:latin typeface="+mn-lt"/>
+        <a:ea typeface="+mn-ea"/>
+        <a:cs typeface="+mn-cs"/>
+      </a:defRPr>
+    </a:lvl9pPr>
+  </p:notesStyle>
+</p:notesMaster>
+</file>
+
+<file path=ppt/notesSlides/notesSlide1.xml><?xml version="1.0" encoding="utf-8"?>
+<p:notes xmlns:a="http://schemas.openxmlformats.org/drawingml/2006/main" xmlns:p="http://schemas.openxmlformats.org/presentationml/2006/main" xmlns:r="http://schemas.openxmlformats.org/officeDocument/2006/relationships">
+  <p:cSld>
+    <p:spTree>
+      <p:nvGrpSpPr>
+        <p:cNvPr id="1" name=""/>
+        <p:cNvGrpSpPr/>
+        <p:nvPr/>
+      </p:nvGrpSpPr>
+      <p:grpSpPr>
+        <a:xfrm>
+          <a:off x="0" y="0"/>
+          <a:ext cx="0" cy="0"/>
+          <a:chOff x="0" y="0"/>
+          <a:chExt cx="0" cy="0"/>
+        </a:xfrm>
+      </p:grpSpPr>
+      <p:sp>
+        <p:nvSpPr>
+          <p:cNvPr id="2" name="Slide Image Placeholder 1"/>
+          <p:cNvSpPr>
+            <a:spLocks noGrp="1"/>
+          </p:cNvSpPr>
+          <p:nvPr>
+            <p:ph type="sldImg" idx="2"/>
+          </p:nvPr>
+        </p:nvSpPr>
+        <p:spPr/>
+      </p:sp>
+      <p:sp>
+        <p:nvSpPr>
+          <p:cNvPr id="3" name="Notes Placeholder 2"/>
+          <p:cNvSpPr>
+            <a:spLocks noGrp="1"/>
+          </p:cNvSpPr>
+          <p:nvPr>
+            <p:ph type="body" idx="3" sz="quarter"/>
+          </p:nvPr>
+        </p:nvSpPr>
+        <p:spPr/>
+        <p:txBody>
+          <a:bodyPr/>
+          <a:lstStyle/>
+          <a:p>
+            <a:r>
+              <a:t>Two claims withdrawn this week. (1) Effective rank does not predict transfer - I predicted joint would win on that basis, and masking won at every budget. (2) An apparent Barth win was selection bias from reporting the best of 15 checkpoints; every objective seed mean is below classical. The summary now reports seed means and marks best-of-15 as an upper bound.</a:t>
+            </a:r>
+          </a:p>
+        </p:txBody>
+      </p:sp>
+      <p:sp>
+        <p:nvSpPr>
+          <p:cNvPr id="4" name="Slide Number Placeholder 3"/>
+          <p:cNvSpPr>
+            <a:spLocks noGrp="1"/>
+          </p:cNvSpPr>
+          <p:nvPr>
+            <p:ph type="sldNum" idx="5" sz="quarter"/>
+          </p:nvPr>
+        </p:nvSpPr>
+        <p:spPr/>
+      </p:sp>
+    </p:spTree>
+  </p:cSld>
+  <p:clrMapOvr>
+    <a:masterClrMapping/>
+  </p:clrMapOvr>
+</p:notes>
 </file>
 
 <file path=ppt/slideLayouts/slideLayout1.xml><?xml version="1.0" encoding="utf-8"?>
@@ -4614,737 +5034,30 @@
           </a:p>
         </p:txBody>
       </p:sp>
-      <p:graphicFrame>
-        <p:nvGraphicFramePr>
-          <p:cNvPr id="5" name="Table 4"/>
-          <p:cNvGraphicFramePr>
-            <a:graphicFrameLocks noGrp="1"/>
-          </p:cNvGraphicFramePr>
+      <p:pic>
+        <p:nvPicPr>
+          <p:cNvPr id="5" name="Picture 4" descr="fig7_G1_per_cohort_slim.png"/>
+          <p:cNvPicPr>
+            <a:picLocks noChangeAspect="1"/>
+          </p:cNvPicPr>
           <p:nvPr/>
-        </p:nvGraphicFramePr>
-        <p:xfrm>
-          <a:off x="502920" y="1463040"/>
-          <a:ext cx="5577840" cy="1920240"/>
-        </p:xfrm>
-        <a:graphic>
-          <a:graphicData uri="http://schemas.openxmlformats.org/drawingml/2006/table">
-            <a:tbl>
-              <a:tblPr firstRow="1" bandRow="1">
-                <a:tableStyleId>{5C22544A-7EE6-4342-B048-85BDC9FD1C3A}</a:tableStyleId>
-              </a:tblPr>
-              <a:tblGrid>
-                <a:gridCol w="1234440"/>
-                <a:gridCol w="1143000"/>
-                <a:gridCol w="1143000"/>
-                <a:gridCol w="1051560"/>
-                <a:gridCol w="1005840"/>
-              </a:tblGrid>
-              <a:tr h="320040">
-                <a:tc>
-                  <a:txBody>
-                    <a:bodyPr/>
-                    <a:lstStyle/>
-                    <a:p>
-                      <a:pPr algn="ctr"/>
-                      <a:r>
-                        <a:rPr sz="1150" b="1">
-                          <a:solidFill>
-                            <a:srgbClr val="1E2761"/>
-                          </a:solidFill>
-                          <a:latin typeface="Arial"/>
-                        </a:rPr>
-                        <a:t>k per class</a:t>
-                      </a:r>
-                    </a:p>
-                  </a:txBody>
-                  <a:tcPr anchor="ctr">
-                    <a:solidFill>
-                      <a:srgbClr val="F4F2EA"/>
-                    </a:solidFill>
-                  </a:tcPr>
-                </a:tc>
-                <a:tc>
-                  <a:txBody>
-                    <a:bodyPr/>
-                    <a:lstStyle/>
-                    <a:p>
-                      <a:pPr algn="ctr"/>
-                      <a:r>
-                        <a:rPr sz="1150" b="1">
-                          <a:solidFill>
-                            <a:srgbClr val="1E2761"/>
-                          </a:solidFill>
-                          <a:latin typeface="Arial"/>
-                        </a:rPr>
-                        <a:t>classical</a:t>
-                      </a:r>
-                    </a:p>
-                  </a:txBody>
-                  <a:tcPr anchor="ctr">
-                    <a:solidFill>
-                      <a:srgbClr val="F4F2EA"/>
-                    </a:solidFill>
-                  </a:tcPr>
-                </a:tc>
-                <a:tc>
-                  <a:txBody>
-                    <a:bodyPr/>
-                    <a:lstStyle/>
-                    <a:p>
-                      <a:pPr algn="ctr"/>
-                      <a:r>
-                        <a:rPr sz="1150" b="1">
-                          <a:solidFill>
-                            <a:srgbClr val="1E2761"/>
-                          </a:solidFill>
-                          <a:latin typeface="Arial"/>
-                        </a:rPr>
-                        <a:t>masking</a:t>
-                      </a:r>
-                    </a:p>
-                  </a:txBody>
-                  <a:tcPr anchor="ctr">
-                    <a:solidFill>
-                      <a:srgbClr val="F4F2EA"/>
-                    </a:solidFill>
-                  </a:tcPr>
-                </a:tc>
-                <a:tc>
-                  <a:txBody>
-                    <a:bodyPr/>
-                    <a:lstStyle/>
-                    <a:p>
-                      <a:pPr algn="ctr"/>
-                      <a:r>
-                        <a:rPr sz="1150" b="1">
-                          <a:solidFill>
-                            <a:srgbClr val="1E2761"/>
-                          </a:solidFill>
-                          <a:latin typeface="Arial"/>
-                        </a:rPr>
-                        <a:t>jigsaw</a:t>
-                      </a:r>
-                    </a:p>
-                  </a:txBody>
-                  <a:tcPr anchor="ctr">
-                    <a:solidFill>
-                      <a:srgbClr val="F4F2EA"/>
-                    </a:solidFill>
-                  </a:tcPr>
-                </a:tc>
-                <a:tc>
-                  <a:txBody>
-                    <a:bodyPr/>
-                    <a:lstStyle/>
-                    <a:p>
-                      <a:pPr algn="ctr"/>
-                      <a:r>
-                        <a:rPr sz="1150" b="1">
-                          <a:solidFill>
-                            <a:srgbClr val="1E2761"/>
-                          </a:solidFill>
-                          <a:latin typeface="Arial"/>
-                        </a:rPr>
-                        <a:t>joint</a:t>
-                      </a:r>
-                    </a:p>
-                  </a:txBody>
-                  <a:tcPr anchor="ctr">
-                    <a:solidFill>
-                      <a:srgbClr val="F4F2EA"/>
-                    </a:solidFill>
-                  </a:tcPr>
-                </a:tc>
-              </a:tr>
-              <a:tr h="320040">
-                <a:tc>
-                  <a:txBody>
-                    <a:bodyPr/>
-                    <a:lstStyle/>
-                    <a:p>
-                      <a:pPr algn="ctr"/>
-                      <a:r>
-                        <a:rPr sz="1150" b="0">
-                          <a:solidFill>
-                            <a:srgbClr val="3C3C48"/>
-                          </a:solidFill>
-                          <a:latin typeface="Arial"/>
-                        </a:rPr>
-                        <a:t>5</a:t>
-                      </a:r>
-                    </a:p>
-                  </a:txBody>
-                  <a:tcPr anchor="ctr">
-                    <a:solidFill>
-                      <a:srgbClr val="FFFFFF"/>
-                    </a:solidFill>
-                  </a:tcPr>
-                </a:tc>
-                <a:tc>
-                  <a:txBody>
-                    <a:bodyPr/>
-                    <a:lstStyle/>
-                    <a:p>
-                      <a:pPr algn="ctr"/>
-                      <a:r>
-                        <a:rPr sz="1150" b="0">
-                          <a:solidFill>
-                            <a:srgbClr val="2E5E9E"/>
-                          </a:solidFill>
-                          <a:latin typeface="Arial"/>
-                        </a:rPr>
-                        <a:t>0.597</a:t>
-                      </a:r>
-                    </a:p>
-                  </a:txBody>
-                  <a:tcPr anchor="ctr">
-                    <a:solidFill>
-                      <a:srgbClr val="FFFFFF"/>
-                    </a:solidFill>
-                  </a:tcPr>
-                </a:tc>
-                <a:tc>
-                  <a:txBody>
-                    <a:bodyPr/>
-                    <a:lstStyle/>
-                    <a:p>
-                      <a:pPr algn="ctr"/>
-                      <a:r>
-                        <a:rPr sz="1150" b="0">
-                          <a:solidFill>
-                            <a:srgbClr val="3C3C48"/>
-                          </a:solidFill>
-                          <a:latin typeface="Arial"/>
-                        </a:rPr>
-                        <a:t>0.549</a:t>
-                      </a:r>
-                    </a:p>
-                  </a:txBody>
-                  <a:tcPr anchor="ctr">
-                    <a:solidFill>
-                      <a:srgbClr val="FFFFFF"/>
-                    </a:solidFill>
-                  </a:tcPr>
-                </a:tc>
-                <a:tc>
-                  <a:txBody>
-                    <a:bodyPr/>
-                    <a:lstStyle/>
-                    <a:p>
-                      <a:pPr algn="ctr"/>
-                      <a:r>
-                        <a:rPr sz="1150" b="0">
-                          <a:solidFill>
-                            <a:srgbClr val="3C3C48"/>
-                          </a:solidFill>
-                          <a:latin typeface="Arial"/>
-                        </a:rPr>
-                        <a:t>0.498</a:t>
-                      </a:r>
-                    </a:p>
-                  </a:txBody>
-                  <a:tcPr anchor="ctr">
-                    <a:solidFill>
-                      <a:srgbClr val="FFFFFF"/>
-                    </a:solidFill>
-                  </a:tcPr>
-                </a:tc>
-                <a:tc>
-                  <a:txBody>
-                    <a:bodyPr/>
-                    <a:lstStyle/>
-                    <a:p>
-                      <a:pPr algn="ctr"/>
-                      <a:r>
-                        <a:rPr sz="1150" b="0">
-                          <a:solidFill>
-                            <a:srgbClr val="3C3C48"/>
-                          </a:solidFill>
-                          <a:latin typeface="Arial"/>
-                        </a:rPr>
-                        <a:t>0.516</a:t>
-                      </a:r>
-                    </a:p>
-                  </a:txBody>
-                  <a:tcPr anchor="ctr">
-                    <a:solidFill>
-                      <a:srgbClr val="FFFFFF"/>
-                    </a:solidFill>
-                  </a:tcPr>
-                </a:tc>
-              </a:tr>
-              <a:tr h="320040">
-                <a:tc>
-                  <a:txBody>
-                    <a:bodyPr/>
-                    <a:lstStyle/>
-                    <a:p>
-                      <a:pPr algn="ctr"/>
-                      <a:r>
-                        <a:rPr sz="1150" b="0">
-                          <a:solidFill>
-                            <a:srgbClr val="3C3C48"/>
-                          </a:solidFill>
-                          <a:latin typeface="Arial"/>
-                        </a:rPr>
-                        <a:t>10</a:t>
-                      </a:r>
-                    </a:p>
-                  </a:txBody>
-                  <a:tcPr anchor="ctr">
-                    <a:solidFill>
-                      <a:srgbClr val="FFFFFF"/>
-                    </a:solidFill>
-                  </a:tcPr>
-                </a:tc>
-                <a:tc>
-                  <a:txBody>
-                    <a:bodyPr/>
-                    <a:lstStyle/>
-                    <a:p>
-                      <a:pPr algn="ctr"/>
-                      <a:r>
-                        <a:rPr sz="1150" b="0">
-                          <a:solidFill>
-                            <a:srgbClr val="2E5E9E"/>
-                          </a:solidFill>
-                          <a:latin typeface="Arial"/>
-                        </a:rPr>
-                        <a:t>0.653</a:t>
-                      </a:r>
-                    </a:p>
-                  </a:txBody>
-                  <a:tcPr anchor="ctr">
-                    <a:solidFill>
-                      <a:srgbClr val="FFFFFF"/>
-                    </a:solidFill>
-                  </a:tcPr>
-                </a:tc>
-                <a:tc>
-                  <a:txBody>
-                    <a:bodyPr/>
-                    <a:lstStyle/>
-                    <a:p>
-                      <a:pPr algn="ctr"/>
-                      <a:r>
-                        <a:rPr sz="1150" b="0">
-                          <a:solidFill>
-                            <a:srgbClr val="3C3C48"/>
-                          </a:solidFill>
-                          <a:latin typeface="Arial"/>
-                        </a:rPr>
-                        <a:t>0.593</a:t>
-                      </a:r>
-                    </a:p>
-                  </a:txBody>
-                  <a:tcPr anchor="ctr">
-                    <a:solidFill>
-                      <a:srgbClr val="FFFFFF"/>
-                    </a:solidFill>
-                  </a:tcPr>
-                </a:tc>
-                <a:tc>
-                  <a:txBody>
-                    <a:bodyPr/>
-                    <a:lstStyle/>
-                    <a:p>
-                      <a:pPr algn="ctr"/>
-                      <a:r>
-                        <a:rPr sz="1150" b="0">
-                          <a:solidFill>
-                            <a:srgbClr val="3C3C48"/>
-                          </a:solidFill>
-                          <a:latin typeface="Arial"/>
-                        </a:rPr>
-                        <a:t>0.531</a:t>
-                      </a:r>
-                    </a:p>
-                  </a:txBody>
-                  <a:tcPr anchor="ctr">
-                    <a:solidFill>
-                      <a:srgbClr val="FFFFFF"/>
-                    </a:solidFill>
-                  </a:tcPr>
-                </a:tc>
-                <a:tc>
-                  <a:txBody>
-                    <a:bodyPr/>
-                    <a:lstStyle/>
-                    <a:p>
-                      <a:pPr algn="ctr"/>
-                      <a:r>
-                        <a:rPr sz="1150" b="0">
-                          <a:solidFill>
-                            <a:srgbClr val="3C3C48"/>
-                          </a:solidFill>
-                          <a:latin typeface="Arial"/>
-                        </a:rPr>
-                        <a:t>0.548</a:t>
-                      </a:r>
-                    </a:p>
-                  </a:txBody>
-                  <a:tcPr anchor="ctr">
-                    <a:solidFill>
-                      <a:srgbClr val="FFFFFF"/>
-                    </a:solidFill>
-                  </a:tcPr>
-                </a:tc>
-              </a:tr>
-              <a:tr h="320040">
-                <a:tc>
-                  <a:txBody>
-                    <a:bodyPr/>
-                    <a:lstStyle/>
-                    <a:p>
-                      <a:pPr algn="ctr"/>
-                      <a:r>
-                        <a:rPr sz="1150" b="0">
-                          <a:solidFill>
-                            <a:srgbClr val="3C3C48"/>
-                          </a:solidFill>
-                          <a:latin typeface="Arial"/>
-                        </a:rPr>
-                        <a:t>20</a:t>
-                      </a:r>
-                    </a:p>
-                  </a:txBody>
-                  <a:tcPr anchor="ctr">
-                    <a:solidFill>
-                      <a:srgbClr val="FFFFFF"/>
-                    </a:solidFill>
-                  </a:tcPr>
-                </a:tc>
-                <a:tc>
-                  <a:txBody>
-                    <a:bodyPr/>
-                    <a:lstStyle/>
-                    <a:p>
-                      <a:pPr algn="ctr"/>
-                      <a:r>
-                        <a:rPr sz="1150" b="0">
-                          <a:solidFill>
-                            <a:srgbClr val="2E5E9E"/>
-                          </a:solidFill>
-                          <a:latin typeface="Arial"/>
-                        </a:rPr>
-                        <a:t>0.705</a:t>
-                      </a:r>
-                    </a:p>
-                  </a:txBody>
-                  <a:tcPr anchor="ctr">
-                    <a:solidFill>
-                      <a:srgbClr val="FFFFFF"/>
-                    </a:solidFill>
-                  </a:tcPr>
-                </a:tc>
-                <a:tc>
-                  <a:txBody>
-                    <a:bodyPr/>
-                    <a:lstStyle/>
-                    <a:p>
-                      <a:pPr algn="ctr"/>
-                      <a:r>
-                        <a:rPr sz="1150" b="0">
-                          <a:solidFill>
-                            <a:srgbClr val="3C3C48"/>
-                          </a:solidFill>
-                          <a:latin typeface="Arial"/>
-                        </a:rPr>
-                        <a:t>0.633</a:t>
-                      </a:r>
-                    </a:p>
-                  </a:txBody>
-                  <a:tcPr anchor="ctr">
-                    <a:solidFill>
-                      <a:srgbClr val="FFFFFF"/>
-                    </a:solidFill>
-                  </a:tcPr>
-                </a:tc>
-                <a:tc>
-                  <a:txBody>
-                    <a:bodyPr/>
-                    <a:lstStyle/>
-                    <a:p>
-                      <a:pPr algn="ctr"/>
-                      <a:r>
-                        <a:rPr sz="1150" b="0">
-                          <a:solidFill>
-                            <a:srgbClr val="3C3C48"/>
-                          </a:solidFill>
-                          <a:latin typeface="Arial"/>
-                        </a:rPr>
-                        <a:t>0.561</a:t>
-                      </a:r>
-                    </a:p>
-                  </a:txBody>
-                  <a:tcPr anchor="ctr">
-                    <a:solidFill>
-                      <a:srgbClr val="FFFFFF"/>
-                    </a:solidFill>
-                  </a:tcPr>
-                </a:tc>
-                <a:tc>
-                  <a:txBody>
-                    <a:bodyPr/>
-                    <a:lstStyle/>
-                    <a:p>
-                      <a:pPr algn="ctr"/>
-                      <a:r>
-                        <a:rPr sz="1150" b="0">
-                          <a:solidFill>
-                            <a:srgbClr val="3C3C48"/>
-                          </a:solidFill>
-                          <a:latin typeface="Arial"/>
-                        </a:rPr>
-                        <a:t>0.580</a:t>
-                      </a:r>
-                    </a:p>
-                  </a:txBody>
-                  <a:tcPr anchor="ctr">
-                    <a:solidFill>
-                      <a:srgbClr val="FFFFFF"/>
-                    </a:solidFill>
-                  </a:tcPr>
-                </a:tc>
-              </a:tr>
-              <a:tr h="320040">
-                <a:tc>
-                  <a:txBody>
-                    <a:bodyPr/>
-                    <a:lstStyle/>
-                    <a:p>
-                      <a:pPr algn="ctr"/>
-                      <a:r>
-                        <a:rPr sz="1150" b="0">
-                          <a:solidFill>
-                            <a:srgbClr val="3C3C48"/>
-                          </a:solidFill>
-                          <a:latin typeface="Arial"/>
-                        </a:rPr>
-                        <a:t>40</a:t>
-                      </a:r>
-                    </a:p>
-                  </a:txBody>
-                  <a:tcPr anchor="ctr">
-                    <a:solidFill>
-                      <a:srgbClr val="FFFFFF"/>
-                    </a:solidFill>
-                  </a:tcPr>
-                </a:tc>
-                <a:tc>
-                  <a:txBody>
-                    <a:bodyPr/>
-                    <a:lstStyle/>
-                    <a:p>
-                      <a:pPr algn="ctr"/>
-                      <a:r>
-                        <a:rPr sz="1150" b="0">
-                          <a:solidFill>
-                            <a:srgbClr val="2E5E9E"/>
-                          </a:solidFill>
-                          <a:latin typeface="Arial"/>
-                        </a:rPr>
-                        <a:t>0.738</a:t>
-                      </a:r>
-                    </a:p>
-                  </a:txBody>
-                  <a:tcPr anchor="ctr">
-                    <a:solidFill>
-                      <a:srgbClr val="FFFFFF"/>
-                    </a:solidFill>
-                  </a:tcPr>
-                </a:tc>
-                <a:tc>
-                  <a:txBody>
-                    <a:bodyPr/>
-                    <a:lstStyle/>
-                    <a:p>
-                      <a:pPr algn="ctr"/>
-                      <a:r>
-                        <a:rPr sz="1150" b="0">
-                          <a:solidFill>
-                            <a:srgbClr val="3C3C48"/>
-                          </a:solidFill>
-                          <a:latin typeface="Arial"/>
-                        </a:rPr>
-                        <a:t>0.672</a:t>
-                      </a:r>
-                    </a:p>
-                  </a:txBody>
-                  <a:tcPr anchor="ctr">
-                    <a:solidFill>
-                      <a:srgbClr val="FFFFFF"/>
-                    </a:solidFill>
-                  </a:tcPr>
-                </a:tc>
-                <a:tc>
-                  <a:txBody>
-                    <a:bodyPr/>
-                    <a:lstStyle/>
-                    <a:p>
-                      <a:pPr algn="ctr"/>
-                      <a:r>
-                        <a:rPr sz="1150" b="0">
-                          <a:solidFill>
-                            <a:srgbClr val="3C3C48"/>
-                          </a:solidFill>
-                          <a:latin typeface="Arial"/>
-                        </a:rPr>
-                        <a:t>0.587</a:t>
-                      </a:r>
-                    </a:p>
-                  </a:txBody>
-                  <a:tcPr anchor="ctr">
-                    <a:solidFill>
-                      <a:srgbClr val="FFFFFF"/>
-                    </a:solidFill>
-                  </a:tcPr>
-                </a:tc>
-                <a:tc>
-                  <a:txBody>
-                    <a:bodyPr/>
-                    <a:lstStyle/>
-                    <a:p>
-                      <a:pPr algn="ctr"/>
-                      <a:r>
-                        <a:rPr sz="1150" b="0">
-                          <a:solidFill>
-                            <a:srgbClr val="3C3C48"/>
-                          </a:solidFill>
-                          <a:latin typeface="Arial"/>
-                        </a:rPr>
-                        <a:t>0.611</a:t>
-                      </a:r>
-                    </a:p>
-                  </a:txBody>
-                  <a:tcPr anchor="ctr">
-                    <a:solidFill>
-                      <a:srgbClr val="FFFFFF"/>
-                    </a:solidFill>
-                  </a:tcPr>
-                </a:tc>
-              </a:tr>
-              <a:tr h="320040">
-                <a:tc>
-                  <a:txBody>
-                    <a:bodyPr/>
-                    <a:lstStyle/>
-                    <a:p>
-                      <a:pPr algn="ctr"/>
-                      <a:r>
-                        <a:rPr sz="1150" b="0">
-                          <a:solidFill>
-                            <a:srgbClr val="3C3C48"/>
-                          </a:solidFill>
-                          <a:latin typeface="Arial"/>
-                        </a:rPr>
-                        <a:t>all</a:t>
-                      </a:r>
-                    </a:p>
-                  </a:txBody>
-                  <a:tcPr anchor="ctr">
-                    <a:solidFill>
-                      <a:srgbClr val="FFFFFF"/>
-                    </a:solidFill>
-                  </a:tcPr>
-                </a:tc>
-                <a:tc>
-                  <a:txBody>
-                    <a:bodyPr/>
-                    <a:lstStyle/>
-                    <a:p>
-                      <a:pPr algn="ctr"/>
-                      <a:r>
-                        <a:rPr sz="1150" b="0">
-                          <a:solidFill>
-                            <a:srgbClr val="2E5E9E"/>
-                          </a:solidFill>
-                          <a:latin typeface="Arial"/>
-                        </a:rPr>
-                        <a:t>0.729</a:t>
-                      </a:r>
-                    </a:p>
-                  </a:txBody>
-                  <a:tcPr anchor="ctr">
-                    <a:solidFill>
-                      <a:srgbClr val="FFFFFF"/>
-                    </a:solidFill>
-                  </a:tcPr>
-                </a:tc>
-                <a:tc>
-                  <a:txBody>
-                    <a:bodyPr/>
-                    <a:lstStyle/>
-                    <a:p>
-                      <a:pPr algn="ctr"/>
-                      <a:r>
-                        <a:rPr sz="1150" b="0">
-                          <a:solidFill>
-                            <a:srgbClr val="3C3C48"/>
-                          </a:solidFill>
-                          <a:latin typeface="Arial"/>
-                        </a:rPr>
-                        <a:t>0.657</a:t>
-                      </a:r>
-                    </a:p>
-                  </a:txBody>
-                  <a:tcPr anchor="ctr">
-                    <a:solidFill>
-                      <a:srgbClr val="FFFFFF"/>
-                    </a:solidFill>
-                  </a:tcPr>
-                </a:tc>
-                <a:tc>
-                  <a:txBody>
-                    <a:bodyPr/>
-                    <a:lstStyle/>
-                    <a:p>
-                      <a:pPr algn="ctr"/>
-                      <a:r>
-                        <a:rPr sz="1150" b="0">
-                          <a:solidFill>
-                            <a:srgbClr val="3C3C48"/>
-                          </a:solidFill>
-                          <a:latin typeface="Arial"/>
-                        </a:rPr>
-                        <a:t>0.573</a:t>
-                      </a:r>
-                    </a:p>
-                  </a:txBody>
-                  <a:tcPr anchor="ctr">
-                    <a:solidFill>
-                      <a:srgbClr val="FFFFFF"/>
-                    </a:solidFill>
-                  </a:tcPr>
-                </a:tc>
-                <a:tc>
-                  <a:txBody>
-                    <a:bodyPr/>
-                    <a:lstStyle/>
-                    <a:p>
-                      <a:pPr algn="ctr"/>
-                      <a:r>
-                        <a:rPr sz="1150" b="0">
-                          <a:solidFill>
-                            <a:srgbClr val="3C3C48"/>
-                          </a:solidFill>
-                          <a:latin typeface="Arial"/>
-                        </a:rPr>
-                        <a:t>0.607</a:t>
-                      </a:r>
-                    </a:p>
-                  </a:txBody>
-                  <a:tcPr anchor="ctr">
-                    <a:solidFill>
-                      <a:srgbClr val="FFFFFF"/>
-                    </a:solidFill>
-                  </a:tcPr>
-                </a:tc>
-              </a:tr>
-            </a:tbl>
-          </a:graphicData>
-        </a:graphic>
-      </p:graphicFrame>
+        </p:nvPicPr>
+        <p:blipFill>
+          <a:blip r:embed="rId2"/>
+          <a:stretch>
+            <a:fillRect/>
+          </a:stretch>
+        </p:blipFill>
+        <p:spPr>
+          <a:xfrm>
+            <a:off x="502920" y="1335024"/>
+            <a:ext cx="11155680" cy="4141124"/>
+          </a:xfrm>
+          <a:prstGeom prst="rect">
+            <a:avLst/>
+          </a:prstGeom>
+        </p:spPr>
+      </p:pic>
       <p:sp>
         <p:nvSpPr>
           <p:cNvPr id="6" name="TextBox 5"/>
@@ -5353,8 +5066,8 @@
         </p:nvSpPr>
         <p:spPr>
           <a:xfrm>
-            <a:off x="502920" y="3474720"/>
-            <a:ext cx="5577840" cy="274320"/>
+            <a:off x="502920" y="5468112"/>
+            <a:ext cx="11155680" cy="274320"/>
           </a:xfrm>
           <a:prstGeom prst="rect">
             <a:avLst/>
@@ -5369,13 +5082,13 @@
           <a:p>
             <a:pPr algn="l"/>
             <a:r>
-              <a:rPr sz="1000" b="0" i="1">
+              <a:rPr sz="950" b="0" i="1">
                 <a:solidFill>
                   <a:srgbClr val="5A5A6E"/>
                 </a:solidFill>
                 <a:latin typeface="Arial"/>
               </a:rPr>
-              <a:t>Mean balanced accuracy, 6 targets x 5 seeds x 50 paired episodes</a:t>
+              <a:t>Balanced accuracy vs labelled examples per class. Error bars: sd across 5 pretraining seeds. Red band: +/- episode sd for classical. 50 paired episodes per point.</a:t>
             </a:r>
           </a:p>
         </p:txBody>
@@ -5388,8 +5101,8 @@
         </p:nvSpPr>
         <p:spPr>
           <a:xfrm>
-            <a:off x="6400800" y="1463040"/>
-            <a:ext cx="5257800" cy="2011680"/>
+            <a:off x="502920" y="5760720"/>
+            <a:ext cx="5486400" cy="969264"/>
           </a:xfrm>
           <a:prstGeom prst="roundRect">
             <a:avLst>
@@ -5397,7 +5110,7 @@
             </a:avLst>
           </a:prstGeom>
           <a:solidFill>
-            <a:srgbClr val="EAF3EC"/>
+            <a:srgbClr val="FBECEC"/>
           </a:solidFill>
           <a:ln>
             <a:noFill/>
@@ -5434,8 +5147,8 @@
         </p:nvSpPr>
         <p:spPr>
           <a:xfrm>
-            <a:off x="6656832" y="1591056"/>
-            <a:ext cx="4754880" cy="292608"/>
+            <a:off x="731520" y="5870448"/>
+            <a:ext cx="5029200" cy="786384"/>
           </a:xfrm>
           <a:prstGeom prst="rect">
             <a:avLst/>
@@ -5450,62 +5163,36 @@
           <a:p>
             <a:pPr algn="l"/>
             <a:r>
-              <a:rPr sz="1500" b="1" i="0">
-                <a:solidFill>
-                  <a:srgbClr val="1F6B3B"/>
+              <a:rPr sz="1050" b="1" i="0">
+                <a:solidFill>
+                  <a:srgbClr val="C0272D"/>
                 </a:solidFill>
                 <a:latin typeface="Arial"/>
               </a:rPr>
-              <a:t>Pretraining does work</a:t>
-            </a:r>
-          </a:p>
-        </p:txBody>
-      </p:sp>
-      <p:sp>
-        <p:nvSpPr>
-          <p:cNvPr id="9" name="TextBox 8"/>
-          <p:cNvSpPr txBox="1"/>
-          <p:nvPr/>
-        </p:nvSpPr>
-        <p:spPr>
-          <a:xfrm>
-            <a:off x="6656832" y="1956816"/>
-            <a:ext cx="4754880" cy="1417320"/>
-          </a:xfrm>
-          <a:prstGeom prst="rect">
-            <a:avLst/>
-          </a:prstGeom>
-          <a:noFill/>
-        </p:spPr>
-        <p:txBody>
-          <a:bodyPr wrap="square" lIns="0" rIns="0" tIns="0" bIns="0">
-            <a:spAutoFit/>
-          </a:bodyPr>
-          <a:lstStyle/>
-          <a:p>
-            <a:pPr algn="l"/>
-            <a:r>
-              <a:rPr sz="1150" b="0" i="0">
+              <a:t>0 SSL wins / 24 classical wins / 5 ties.  </a:t>
+            </a:r>
+            <a:r>
+              <a:rPr sz="1050" b="0" i="0">
                 <a:solidFill>
                   <a:srgbClr val="3C3C48"/>
                 </a:solidFill>
                 <a:latin typeface="Arial"/>
               </a:rPr>
-              <a:t>Against a random-init backbone of identical architecture on identical episodes, masking gains +0.081 to +0.121 balanced accuracy - consistent across all six targets, far above the 0.045 noise floor. The pretext task teaches the encoder something real. It is worth less than what a shrinkage LDA extracts from 500 spectral bins.</a:t>
-            </a:r>
-          </a:p>
-        </p:txBody>
-      </p:sp>
-      <p:sp>
-        <p:nvSpPr>
-          <p:cNvPr id="10" name="Rounded Rectangle 9"/>
+              <a:t>Classical leads in every cohort at every label budget, including k=5, so there is no few-shot crossover. The gap ranges +0.051 to +0.101.</a:t>
+            </a:r>
+          </a:p>
+        </p:txBody>
+      </p:sp>
+      <p:sp>
+        <p:nvSpPr>
+          <p:cNvPr id="9" name="Rounded Rectangle 8"/>
           <p:cNvSpPr/>
           <p:nvPr/>
         </p:nvSpPr>
         <p:spPr>
           <a:xfrm>
-            <a:off x="502920" y="3913632"/>
-            <a:ext cx="11155680" cy="896112"/>
+            <a:off x="6172200" y="5760720"/>
+            <a:ext cx="5486400" cy="969264"/>
           </a:xfrm>
           <a:prstGeom prst="roundRect">
             <a:avLst>
@@ -5513,7 +5200,7 @@
             </a:avLst>
           </a:prstGeom>
           <a:solidFill>
-            <a:srgbClr val="FBECEC"/>
+            <a:srgbClr val="EAF3EC"/>
           </a:solidFill>
           <a:ln>
             <a:noFill/>
@@ -5544,14 +5231,14 @@
       </p:sp>
       <p:sp>
         <p:nvSpPr>
-          <p:cNvPr id="11" name="TextBox 10"/>
+          <p:cNvPr id="10" name="TextBox 9"/>
           <p:cNvSpPr txBox="1"/>
           <p:nvPr/>
         </p:nvSpPr>
         <p:spPr>
           <a:xfrm>
-            <a:off x="777240" y="4041648"/>
-            <a:ext cx="10607040" cy="676656"/>
+            <a:off x="6400800" y="5870448"/>
+            <a:ext cx="5029200" cy="786384"/>
           </a:xfrm>
           <a:prstGeom prst="rect">
             <a:avLst/>
@@ -5566,112 +5253,22 @@
           <a:p>
             <a:pPr algn="l"/>
             <a:r>
-              <a:rPr sz="1150" b="1" i="0">
-                <a:solidFill>
-                  <a:srgbClr val="C0272D"/>
+              <a:rPr sz="1050" b="1" i="0">
+                <a:solidFill>
+                  <a:srgbClr val="1F6B3B"/>
                 </a:solidFill>
                 <a:latin typeface="Arial"/>
               </a:rPr>
-              <a:t>0 SSL wins / 24 classical wins / 5 ties.  </a:t>
-            </a:r>
-            <a:r>
-              <a:rPr sz="1150" b="0" i="0">
+              <a:t>Pretraining does work.  </a:t>
+            </a:r>
+            <a:r>
+              <a:rPr sz="1050" b="0" i="0">
                 <a:solidFill>
                   <a:srgbClr val="3C3C48"/>
                 </a:solidFill>
                 <a:latin typeface="Arial"/>
               </a:rPr>
-              <a:t>Classical leads at every label budget including k=5, so there is no few-shot crossover. Reproducing this on correctly aligned data closes off 'the data was broken' as the explanation.</a:t>
-            </a:r>
-          </a:p>
-        </p:txBody>
-      </p:sp>
-      <p:sp>
-        <p:nvSpPr>
-          <p:cNvPr id="12" name="Rounded Rectangle 11"/>
-          <p:cNvSpPr/>
-          <p:nvPr/>
-        </p:nvSpPr>
-        <p:spPr>
-          <a:xfrm>
-            <a:off x="502920" y="4974336"/>
-            <a:ext cx="11155680" cy="1060704"/>
-          </a:xfrm>
-          <a:prstGeom prst="roundRect">
-            <a:avLst>
-              <a:gd name="adj" fmla="val 4000"/>
-            </a:avLst>
-          </a:prstGeom>
-          <a:solidFill>
-            <a:srgbClr val="F4F2EA"/>
-          </a:solidFill>
-          <a:ln>
-            <a:noFill/>
-          </a:ln>
-          <a:effectLst/>
-        </p:spPr>
-        <p:style>
-          <a:lnRef idx="1">
-            <a:schemeClr val="accent1"/>
-          </a:lnRef>
-          <a:fillRef idx="3">
-            <a:schemeClr val="accent1"/>
-          </a:fillRef>
-          <a:effectRef idx="2">
-            <a:schemeClr val="accent1"/>
-          </a:effectRef>
-          <a:fontRef idx="minor">
-            <a:schemeClr val="lt1"/>
-          </a:fontRef>
-        </p:style>
-        <p:txBody>
-          <a:bodyPr rtlCol="0" anchor="ctr"/>
-          <a:lstStyle/>
-          <a:p>
-            <a:pPr algn="ctr"/>
-          </a:p>
-        </p:txBody>
-      </p:sp>
-      <p:sp>
-        <p:nvSpPr>
-          <p:cNvPr id="13" name="TextBox 12"/>
-          <p:cNvSpPr txBox="1"/>
-          <p:nvPr/>
-        </p:nvSpPr>
-        <p:spPr>
-          <a:xfrm>
-            <a:off x="777240" y="5102352"/>
-            <a:ext cx="10607040" cy="859536"/>
-          </a:xfrm>
-          <a:prstGeom prst="rect">
-            <a:avLst/>
-          </a:prstGeom>
-          <a:noFill/>
-        </p:spPr>
-        <p:txBody>
-          <a:bodyPr wrap="square" lIns="0" rIns="0" tIns="0" bIns="0">
-            <a:spAutoFit/>
-          </a:bodyPr>
-          <a:lstStyle/>
-          <a:p>
-            <a:pPr algn="l"/>
-            <a:r>
-              <a:rPr sz="1100" b="1" i="0">
-                <a:solidFill>
-                  <a:srgbClr val="3C3C48"/>
-                </a:solidFill>
-                <a:latin typeface="Arial"/>
-              </a:rPr>
-              <a:t>Two claims withdrawn this week.  </a:t>
-            </a:r>
-            <a:r>
-              <a:rPr sz="1100" b="0" i="0">
-                <a:solidFill>
-                  <a:srgbClr val="3C3C48"/>
-                </a:solidFill>
-                <a:latin typeface="Arial"/>
-              </a:rPr>
-              <a:t>(1) Effective rank does not predict transfer - I predicted joint would win on that basis, and masking won at every budget. (2) An apparent Barth win was selection bias from reporting the best of 15 checkpoints; every objective's seed mean is below classical. That same error was retracted once before, so the summary now reports seed means and marks best-of-15 as an upper bound.</a:t>
+              <a:t>Masking beats a random-init backbone by +0.081 to +0.121 on identical episodes - far above the 0.045 noise floor. Still less than a shrinkage LDA on 500 bins.</a:t>
             </a:r>
           </a:p>
         </p:txBody>
@@ -6221,7 +5818,8 @@
                           </a:solidFill>
                           <a:latin typeface="Arial"/>
                         </a:rPr>
-                        <a:t>k=10</a:t>
+                        <a:t>10 labels
+/class</a:t>
                       </a:r>
                     </a:p>
                   </a:txBody>
@@ -6244,7 +5842,8 @@
                           </a:solidFill>
                           <a:latin typeface="Arial"/>
                         </a:rPr>
-                        <a:t>k=all</a:t>
+                        <a:t>all
+labels</a:t>
                       </a:r>
                     </a:p>
                   </a:txBody>
@@ -6764,8 +6363,8 @@
         </p:nvSpPr>
         <p:spPr>
           <a:xfrm>
-            <a:off x="502920" y="4041648"/>
-            <a:ext cx="5486400" cy="274320"/>
+            <a:off x="502920" y="3986784"/>
+            <a:ext cx="5669280" cy="274320"/>
           </a:xfrm>
           <a:prstGeom prst="rect">
             <a:avLst/>
@@ -6780,13 +6379,13 @@
           <a:p>
             <a:pPr algn="l"/>
             <a:r>
-              <a:rPr sz="1000" b="0" i="1">
+              <a:rPr sz="950" b="0" i="1">
                 <a:solidFill>
                   <a:srgbClr val="5A5A6E"/>
                 </a:solidFill>
                 <a:latin typeface="Arial"/>
               </a:rPr>
-              <a:t>Masking, mean over 6 targets; seed sd 0.002-0.021</a:t>
+              <a:t>Masking, mean over 6 targets; seed sd 0.002-0.021. Columns = label budget.</a:t>
             </a:r>
           </a:p>
         </p:txBody>
@@ -7619,4 +7218,324 @@
   </a:objectDefaults>
   <a:extraClrSchemeLst/>
 </a:theme>
+</file>
+
+<file path=ppt/theme/theme2.xml><?xml version="1.0" encoding="utf-8"?>
+<a:theme xmlns:a="http://schemas.openxmlformats.org/drawingml/2006/main" name="Office Theme">
+  <a:themeElements>
+    <a:clrScheme name="Office">
+      <a:dk1>
+        <a:sysClr val="windowText" lastClr="000000"/>
+      </a:dk1>
+      <a:lt1>
+        <a:sysClr val="window" lastClr="FFFFFF"/>
+      </a:lt1>
+      <a:dk2>
+        <a:srgbClr val="1F497D"/>
+      </a:dk2>
+      <a:lt2>
+        <a:srgbClr val="EEECE1"/>
+      </a:lt2>
+      <a:accent1>
+        <a:srgbClr val="4F81BD"/>
+      </a:accent1>
+      <a:accent2>
+        <a:srgbClr val="C0504D"/>
+      </a:accent2>
+      <a:accent3>
+        <a:srgbClr val="9BBB59"/>
+      </a:accent3>
+      <a:accent4>
+        <a:srgbClr val="8064A2"/>
+      </a:accent4>
+      <a:accent5>
+        <a:srgbClr val="4BACC6"/>
+      </a:accent5>
+      <a:accent6>
+        <a:srgbClr val="F79646"/>
+      </a:accent6>
+      <a:hlink>
+        <a:srgbClr val="0000FF"/>
+      </a:hlink>
+      <a:folHlink>
+        <a:srgbClr val="800080"/>
+      </a:folHlink>
+    </a:clrScheme>
+    <a:fontScheme name="Office">
+      <a:majorFont>
+        <a:latin typeface="Calibri"/>
+        <a:ea typeface=""/>
+        <a:cs typeface=""/>
+        <a:font script="Jpan" typeface="ＭＳ Ｐゴシック"/>
+        <a:font script="Hang" typeface="맑은 고딕"/>
+        <a:font script="Hans" typeface="宋体"/>
+        <a:font script="Hant" typeface="新細明體"/>
+        <a:font script="Arab" typeface="Times New Roman"/>
+        <a:font script="Hebr" typeface="Times New Roman"/>
+        <a:font script="Thai" typeface="Angsana New"/>
+        <a:font script="Ethi" typeface="Nyala"/>
+        <a:font script="Beng" typeface="Vrinda"/>
+        <a:font script="Gujr" typeface="Shruti"/>
+        <a:font script="Khmr" typeface="MoolBoran"/>
+        <a:font script="Knda" typeface="Tunga"/>
+        <a:font script="Guru" typeface="Raavi"/>
+        <a:font script="Cans" typeface="Euphemia"/>
+        <a:font script="Cher" typeface="Plantagenet Cherokee"/>
+        <a:font script="Yiii" typeface="Microsoft Yi Baiti"/>
+        <a:font script="Tibt" typeface="Microsoft Himalaya"/>
+        <a:font script="Thaa" typeface="MV Boli"/>
+        <a:font script="Deva" typeface="Mangal"/>
+        <a:font script="Telu" typeface="Gautami"/>
+        <a:font script="Taml" typeface="Latha"/>
+        <a:font script="Syrc" typeface="Estrangelo Edessa"/>
+        <a:font script="Orya" typeface="Kalinga"/>
+        <a:font script="Mlym" typeface="Kartika"/>
+        <a:font script="Laoo" typeface="DokChampa"/>
+        <a:font script="Sinh" typeface="Iskoola Pota"/>
+        <a:font script="Mong" typeface="Mongolian Baiti"/>
+        <a:font script="Viet" typeface="Times New Roman"/>
+        <a:font script="Uigh" typeface="Microsoft Uighur"/>
+        <a:font script="Geor" typeface="Sylfaen"/>
+      </a:majorFont>
+      <a:minorFont>
+        <a:latin typeface="Calibri"/>
+        <a:ea typeface=""/>
+        <a:cs typeface=""/>
+        <a:font script="Jpan" typeface="ＭＳ Ｐゴシック"/>
+        <a:font script="Hang" typeface="맑은 고딕"/>
+        <a:font script="Hans" typeface="宋体"/>
+        <a:font script="Hant" typeface="新細明體"/>
+        <a:font script="Arab" typeface="Arial"/>
+        <a:font script="Hebr" typeface="Arial"/>
+        <a:font script="Thai" typeface="Cordia New"/>
+        <a:font script="Ethi" typeface="Nyala"/>
+        <a:font script="Beng" typeface="Vrinda"/>
+        <a:font script="Gujr" typeface="Shruti"/>
+        <a:font script="Khmr" typeface="DaunPenh"/>
+        <a:font script="Knda" typeface="Tunga"/>
+        <a:font script="Guru" typeface="Raavi"/>
+        <a:font script="Cans" typeface="Euphemia"/>
+        <a:font script="Cher" typeface="Plantagenet Cherokee"/>
+        <a:font script="Yiii" typeface="Microsoft Yi Baiti"/>
+        <a:font script="Tibt" typeface="Microsoft Himalaya"/>
+        <a:font script="Thaa" typeface="MV Boli"/>
+        <a:font script="Deva" typeface="Mangal"/>
+        <a:font script="Telu" typeface="Gautami"/>
+        <a:font script="Taml" typeface="Latha"/>
+        <a:font script="Syrc" typeface="Estrangelo Edessa"/>
+        <a:font script="Orya" typeface="Kalinga"/>
+        <a:font script="Mlym" typeface="Kartika"/>
+        <a:font script="Laoo" typeface="DokChampa"/>
+        <a:font script="Sinh" typeface="Iskoola Pota"/>
+        <a:font script="Mong" typeface="Mongolian Baiti"/>
+        <a:font script="Viet" typeface="Arial"/>
+        <a:font script="Uigh" typeface="Microsoft Uighur"/>
+        <a:font script="Geor" typeface="Sylfaen"/>
+      </a:minorFont>
+    </a:fontScheme>
+    <a:fmtScheme name="Office">
+      <a:fillStyleLst>
+        <a:solidFill>
+          <a:schemeClr val="phClr"/>
+        </a:solidFill>
+        <a:gradFill rotWithShape="1">
+          <a:gsLst>
+            <a:gs pos="0">
+              <a:schemeClr val="phClr">
+                <a:tint val="50000"/>
+                <a:satMod val="300000"/>
+              </a:schemeClr>
+            </a:gs>
+            <a:gs pos="35000">
+              <a:schemeClr val="phClr">
+                <a:tint val="37000"/>
+                <a:satMod val="300000"/>
+              </a:schemeClr>
+            </a:gs>
+            <a:gs pos="100000">
+              <a:schemeClr val="phClr">
+                <a:tint val="15000"/>
+                <a:satMod val="350000"/>
+              </a:schemeClr>
+            </a:gs>
+          </a:gsLst>
+          <a:lin ang="16200000" scaled="1"/>
+        </a:gradFill>
+        <a:gradFill rotWithShape="1">
+          <a:gsLst>
+            <a:gs pos="0">
+              <a:schemeClr val="phClr">
+                <a:tint val="100000"/>
+                <a:shade val="100000"/>
+                <a:satMod val="130000"/>
+              </a:schemeClr>
+            </a:gs>
+            <a:gs pos="100000">
+              <a:schemeClr val="phClr">
+                <a:tint val="50000"/>
+                <a:shade val="100000"/>
+                <a:satMod val="350000"/>
+              </a:schemeClr>
+            </a:gs>
+          </a:gsLst>
+          <a:lin ang="16200000" scaled="0"/>
+        </a:gradFill>
+      </a:fillStyleLst>
+      <a:lnStyleLst>
+        <a:ln w="9525" cap="flat" cmpd="sng" algn="ctr">
+          <a:solidFill>
+            <a:schemeClr val="phClr">
+              <a:shade val="95000"/>
+              <a:satMod val="105000"/>
+            </a:schemeClr>
+          </a:solidFill>
+          <a:prstDash val="solid"/>
+        </a:ln>
+        <a:ln w="25400" cap="flat" cmpd="sng" algn="ctr">
+          <a:solidFill>
+            <a:schemeClr val="phClr"/>
+          </a:solidFill>
+          <a:prstDash val="solid"/>
+        </a:ln>
+        <a:ln w="38100" cap="flat" cmpd="sng" algn="ctr">
+          <a:solidFill>
+            <a:schemeClr val="phClr"/>
+          </a:solidFill>
+          <a:prstDash val="solid"/>
+        </a:ln>
+      </a:lnStyleLst>
+      <a:effectStyleLst>
+        <a:effectStyle>
+          <a:effectLst>
+            <a:outerShdw blurRad="40000" dist="20000" dir="5400000" rotWithShape="0">
+              <a:srgbClr val="000000">
+                <a:alpha val="38000"/>
+              </a:srgbClr>
+            </a:outerShdw>
+          </a:effectLst>
+        </a:effectStyle>
+        <a:effectStyle>
+          <a:effectLst>
+            <a:outerShdw blurRad="40000" dist="23000" dir="5400000" rotWithShape="0">
+              <a:srgbClr val="000000">
+                <a:alpha val="35000"/>
+              </a:srgbClr>
+            </a:outerShdw>
+          </a:effectLst>
+        </a:effectStyle>
+        <a:effectStyle>
+          <a:effectLst>
+            <a:outerShdw blurRad="40000" dist="23000" dir="5400000" rotWithShape="0">
+              <a:srgbClr val="000000">
+                <a:alpha val="35000"/>
+              </a:srgbClr>
+            </a:outerShdw>
+          </a:effectLst>
+          <a:scene3d>
+            <a:camera prst="orthographicFront">
+              <a:rot lat="0" lon="0" rev="0"/>
+            </a:camera>
+            <a:lightRig rig="threePt" dir="t">
+              <a:rot lat="0" lon="0" rev="1200000"/>
+            </a:lightRig>
+          </a:scene3d>
+          <a:sp3d>
+            <a:bevelT w="63500" h="25400"/>
+          </a:sp3d>
+        </a:effectStyle>
+      </a:effectStyleLst>
+      <a:bgFillStyleLst>
+        <a:solidFill>
+          <a:schemeClr val="phClr"/>
+        </a:solidFill>
+        <a:gradFill rotWithShape="1">
+          <a:gsLst>
+            <a:gs pos="0">
+              <a:schemeClr val="phClr">
+                <a:tint val="40000"/>
+                <a:satMod val="350000"/>
+              </a:schemeClr>
+            </a:gs>
+            <a:gs pos="40000">
+              <a:schemeClr val="phClr">
+                <a:tint val="45000"/>
+                <a:shade val="99000"/>
+                <a:satMod val="350000"/>
+              </a:schemeClr>
+            </a:gs>
+            <a:gs pos="100000">
+              <a:schemeClr val="phClr">
+                <a:shade val="20000"/>
+                <a:satMod val="255000"/>
+              </a:schemeClr>
+            </a:gs>
+          </a:gsLst>
+          <a:path path="circle">
+            <a:fillToRect l="50000" t="-80000" r="50000" b="180000"/>
+          </a:path>
+        </a:gradFill>
+        <a:gradFill rotWithShape="1">
+          <a:gsLst>
+            <a:gs pos="0">
+              <a:schemeClr val="phClr">
+                <a:tint val="80000"/>
+                <a:satMod val="300000"/>
+              </a:schemeClr>
+            </a:gs>
+            <a:gs pos="100000">
+              <a:schemeClr val="phClr">
+                <a:shade val="30000"/>
+                <a:satMod val="200000"/>
+              </a:schemeClr>
+            </a:gs>
+          </a:gsLst>
+          <a:path path="circle">
+            <a:fillToRect l="50000" t="50000" r="50000" b="50000"/>
+          </a:path>
+        </a:gradFill>
+      </a:bgFillStyleLst>
+    </a:fmtScheme>
+  </a:themeElements>
+  <a:objectDefaults>
+    <a:spDef>
+      <a:spPr/>
+      <a:bodyPr/>
+      <a:lstStyle/>
+      <a:style>
+        <a:lnRef idx="1">
+          <a:schemeClr val="accent1"/>
+        </a:lnRef>
+        <a:fillRef idx="3">
+          <a:schemeClr val="accent1"/>
+        </a:fillRef>
+        <a:effectRef idx="2">
+          <a:schemeClr val="accent1"/>
+        </a:effectRef>
+        <a:fontRef idx="minor">
+          <a:schemeClr val="lt1"/>
+        </a:fontRef>
+      </a:style>
+    </a:spDef>
+    <a:lnDef>
+      <a:spPr/>
+      <a:bodyPr/>
+      <a:lstStyle/>
+      <a:style>
+        <a:lnRef idx="2">
+          <a:schemeClr val="accent1"/>
+        </a:lnRef>
+        <a:fillRef idx="0">
+          <a:schemeClr val="accent1"/>
+        </a:fillRef>
+        <a:effectRef idx="1">
+          <a:schemeClr val="accent1"/>
+        </a:effectRef>
+        <a:fontRef idx="minor">
+          <a:schemeClr val="tx1"/>
+        </a:fontRef>
+      </a:style>
+    </a:lnDef>
+  </a:objectDefaults>
+  <a:extraClrSchemeLst/>
+</a:theme>
 </file>